--- a/img/sello.pptx
+++ b/img/sello.pptx
@@ -2,12 +2,12 @@
 <file path=ppt/presentation.xml><?xml version="1.0" encoding="utf-8"?>
 <p:presentation xmlns:a="http://schemas.openxmlformats.org/drawingml/2006/main" xmlns:r="http://schemas.openxmlformats.org/officeDocument/2006/relationships" xmlns:p="http://schemas.openxmlformats.org/presentationml/2006/main" saveSubsetFonts="1">
   <p:sldMasterIdLst>
-    <p:sldMasterId id="2147483660" r:id="rId1"/>
+    <p:sldMasterId id="2147483672" r:id="rId1"/>
   </p:sldMasterIdLst>
   <p:sldIdLst>
     <p:sldId id="256" r:id="rId2"/>
   </p:sldIdLst>
-  <p:sldSz cx="10799763" cy="5040313"/>
+  <p:sldSz cx="10799763" cy="4679950"/>
   <p:notesSz cx="6858000" cy="9144000"/>
   <p:defaultTextStyle>
     <a:defPPr>
@@ -141,15 +141,15 @@
         </p:nvSpPr>
         <p:spPr>
           <a:xfrm>
-            <a:off x="1349971" y="824885"/>
-            <a:ext cx="8099822" cy="1754776"/>
+            <a:off x="1349971" y="765909"/>
+            <a:ext cx="8099822" cy="1629316"/>
           </a:xfrm>
         </p:spPr>
         <p:txBody>
           <a:bodyPr anchor="b"/>
           <a:lstStyle>
             <a:lvl1pPr algn="ctr">
-              <a:defRPr sz="4410"/>
+              <a:defRPr sz="4094"/>
             </a:lvl1pPr>
           </a:lstStyle>
           <a:p>
@@ -173,8 +173,8 @@
         </p:nvSpPr>
         <p:spPr>
           <a:xfrm>
-            <a:off x="1349971" y="2647331"/>
-            <a:ext cx="8099822" cy="1216909"/>
+            <a:off x="1349971" y="2458058"/>
+            <a:ext cx="8099822" cy="1129904"/>
           </a:xfrm>
         </p:spPr>
         <p:txBody>
@@ -182,39 +182,39 @@
           <a:lstStyle>
             <a:lvl1pPr marL="0" indent="0" algn="ctr">
               <a:buNone/>
-              <a:defRPr sz="1764"/>
+              <a:defRPr sz="1638"/>
             </a:lvl1pPr>
-            <a:lvl2pPr marL="336042" indent="0" algn="ctr">
-              <a:buNone/>
-              <a:defRPr sz="1470"/>
+            <a:lvl2pPr marL="311993" indent="0" algn="ctr">
+              <a:buNone/>
+              <a:defRPr sz="1365"/>
             </a:lvl2pPr>
-            <a:lvl3pPr marL="672084" indent="0" algn="ctr">
-              <a:buNone/>
-              <a:defRPr sz="1323"/>
+            <a:lvl3pPr marL="623987" indent="0" algn="ctr">
+              <a:buNone/>
+              <a:defRPr sz="1228"/>
             </a:lvl3pPr>
-            <a:lvl4pPr marL="1008126" indent="0" algn="ctr">
-              <a:buNone/>
-              <a:defRPr sz="1176"/>
+            <a:lvl4pPr marL="935980" indent="0" algn="ctr">
+              <a:buNone/>
+              <a:defRPr sz="1092"/>
             </a:lvl4pPr>
-            <a:lvl5pPr marL="1344168" indent="0" algn="ctr">
-              <a:buNone/>
-              <a:defRPr sz="1176"/>
+            <a:lvl5pPr marL="1247973" indent="0" algn="ctr">
+              <a:buNone/>
+              <a:defRPr sz="1092"/>
             </a:lvl5pPr>
-            <a:lvl6pPr marL="1680210" indent="0" algn="ctr">
-              <a:buNone/>
-              <a:defRPr sz="1176"/>
+            <a:lvl6pPr marL="1559966" indent="0" algn="ctr">
+              <a:buNone/>
+              <a:defRPr sz="1092"/>
             </a:lvl6pPr>
-            <a:lvl7pPr marL="2016252" indent="0" algn="ctr">
-              <a:buNone/>
-              <a:defRPr sz="1176"/>
+            <a:lvl7pPr marL="1871960" indent="0" algn="ctr">
+              <a:buNone/>
+              <a:defRPr sz="1092"/>
             </a:lvl7pPr>
-            <a:lvl8pPr marL="2352294" indent="0" algn="ctr">
-              <a:buNone/>
-              <a:defRPr sz="1176"/>
+            <a:lvl8pPr marL="2183953" indent="0" algn="ctr">
+              <a:buNone/>
+              <a:defRPr sz="1092"/>
             </a:lvl8pPr>
-            <a:lvl9pPr marL="2688336" indent="0" algn="ctr">
-              <a:buNone/>
-              <a:defRPr sz="1176"/>
+            <a:lvl9pPr marL="2495946" indent="0" algn="ctr">
+              <a:buNone/>
+              <a:defRPr sz="1092"/>
             </a:lvl9pPr>
           </a:lstStyle>
           <a:p>
@@ -243,7 +243,7 @@
           <a:p>
             <a:fld id="{F36677F3-1F9B-46FD-BBE5-D06ED2754F5B}" type="datetimeFigureOut">
               <a:rPr lang="es-ES" smtClean="0"/>
-              <a:t>08/07/2026</a:t>
+              <a:t>10/07/2026</a:t>
             </a:fld>
             <a:endParaRPr lang="es-ES"/>
           </a:p>
@@ -294,7 +294,7 @@
     </p:spTree>
     <p:extLst>
       <p:ext uri="{BB962C8B-B14F-4D97-AF65-F5344CB8AC3E}">
-        <p14:creationId xmlns:p14="http://schemas.microsoft.com/office/powerpoint/2010/main" val="4140444655"/>
+        <p14:creationId xmlns:p14="http://schemas.microsoft.com/office/powerpoint/2010/main" val="3558267773"/>
       </p:ext>
     </p:extLst>
   </p:cSld>
@@ -413,7 +413,7 @@
           <a:p>
             <a:fld id="{F36677F3-1F9B-46FD-BBE5-D06ED2754F5B}" type="datetimeFigureOut">
               <a:rPr lang="es-ES" smtClean="0"/>
-              <a:t>08/07/2026</a:t>
+              <a:t>10/07/2026</a:t>
             </a:fld>
             <a:endParaRPr lang="es-ES"/>
           </a:p>
@@ -464,7 +464,7 @@
     </p:spTree>
     <p:extLst>
       <p:ext uri="{BB962C8B-B14F-4D97-AF65-F5344CB8AC3E}">
-        <p14:creationId xmlns:p14="http://schemas.microsoft.com/office/powerpoint/2010/main" val="1399722358"/>
+        <p14:creationId xmlns:p14="http://schemas.microsoft.com/office/powerpoint/2010/main" val="481827307"/>
       </p:ext>
     </p:extLst>
   </p:cSld>
@@ -503,8 +503,8 @@
         </p:nvSpPr>
         <p:spPr>
           <a:xfrm>
-            <a:off x="7728580" y="268350"/>
-            <a:ext cx="2328699" cy="4271432"/>
+            <a:off x="7728580" y="249164"/>
+            <a:ext cx="2328699" cy="3966041"/>
           </a:xfrm>
         </p:spPr>
         <p:txBody>
@@ -531,8 +531,8 @@
         </p:nvSpPr>
         <p:spPr>
           <a:xfrm>
-            <a:off x="742484" y="268350"/>
-            <a:ext cx="6851100" cy="4271432"/>
+            <a:off x="742484" y="249164"/>
+            <a:ext cx="6851100" cy="3966041"/>
           </a:xfrm>
         </p:spPr>
         <p:txBody>
@@ -593,7 +593,7 @@
           <a:p>
             <a:fld id="{F36677F3-1F9B-46FD-BBE5-D06ED2754F5B}" type="datetimeFigureOut">
               <a:rPr lang="es-ES" smtClean="0"/>
-              <a:t>08/07/2026</a:t>
+              <a:t>10/07/2026</a:t>
             </a:fld>
             <a:endParaRPr lang="es-ES"/>
           </a:p>
@@ -644,7 +644,7 @@
     </p:spTree>
     <p:extLst>
       <p:ext uri="{BB962C8B-B14F-4D97-AF65-F5344CB8AC3E}">
-        <p14:creationId xmlns:p14="http://schemas.microsoft.com/office/powerpoint/2010/main" val="444513018"/>
+        <p14:creationId xmlns:p14="http://schemas.microsoft.com/office/powerpoint/2010/main" val="1219328875"/>
       </p:ext>
     </p:extLst>
   </p:cSld>
@@ -763,7 +763,7 @@
           <a:p>
             <a:fld id="{F36677F3-1F9B-46FD-BBE5-D06ED2754F5B}" type="datetimeFigureOut">
               <a:rPr lang="es-ES" smtClean="0"/>
-              <a:t>08/07/2026</a:t>
+              <a:t>10/07/2026</a:t>
             </a:fld>
             <a:endParaRPr lang="es-ES"/>
           </a:p>
@@ -814,7 +814,7 @@
     </p:spTree>
     <p:extLst>
       <p:ext uri="{BB962C8B-B14F-4D97-AF65-F5344CB8AC3E}">
-        <p14:creationId xmlns:p14="http://schemas.microsoft.com/office/powerpoint/2010/main" val="3888617395"/>
+        <p14:creationId xmlns:p14="http://schemas.microsoft.com/office/powerpoint/2010/main" val="1816825735"/>
       </p:ext>
     </p:extLst>
   </p:cSld>
@@ -853,15 +853,15 @@
         </p:nvSpPr>
         <p:spPr>
           <a:xfrm>
-            <a:off x="736859" y="1256579"/>
-            <a:ext cx="9314796" cy="2096630"/>
+            <a:off x="736859" y="1166738"/>
+            <a:ext cx="9314796" cy="1946729"/>
           </a:xfrm>
         </p:spPr>
         <p:txBody>
           <a:bodyPr anchor="b"/>
           <a:lstStyle>
             <a:lvl1pPr>
-              <a:defRPr sz="4410"/>
+              <a:defRPr sz="4094"/>
             </a:lvl1pPr>
           </a:lstStyle>
           <a:p>
@@ -885,8 +885,8 @@
         </p:nvSpPr>
         <p:spPr>
           <a:xfrm>
-            <a:off x="736859" y="3373044"/>
-            <a:ext cx="9314796" cy="1102568"/>
+            <a:off x="736859" y="3131884"/>
+            <a:ext cx="9314796" cy="1023739"/>
           </a:xfrm>
         </p:spPr>
         <p:txBody>
@@ -894,7 +894,7 @@
           <a:lstStyle>
             <a:lvl1pPr marL="0" indent="0">
               <a:buNone/>
-              <a:defRPr sz="1764">
+              <a:defRPr sz="1638">
                 <a:solidFill>
                   <a:schemeClr val="tx1">
                     <a:tint val="75000"/>
@@ -902,9 +902,9 @@
                 </a:solidFill>
               </a:defRPr>
             </a:lvl1pPr>
-            <a:lvl2pPr marL="336042" indent="0">
-              <a:buNone/>
-              <a:defRPr sz="1470">
+            <a:lvl2pPr marL="311993" indent="0">
+              <a:buNone/>
+              <a:defRPr sz="1365">
                 <a:solidFill>
                   <a:schemeClr val="tx1">
                     <a:tint val="75000"/>
@@ -912,9 +912,9 @@
                 </a:solidFill>
               </a:defRPr>
             </a:lvl2pPr>
-            <a:lvl3pPr marL="672084" indent="0">
-              <a:buNone/>
-              <a:defRPr sz="1323">
+            <a:lvl3pPr marL="623987" indent="0">
+              <a:buNone/>
+              <a:defRPr sz="1228">
                 <a:solidFill>
                   <a:schemeClr val="tx1">
                     <a:tint val="75000"/>
@@ -922,9 +922,9 @@
                 </a:solidFill>
               </a:defRPr>
             </a:lvl3pPr>
-            <a:lvl4pPr marL="1008126" indent="0">
-              <a:buNone/>
-              <a:defRPr sz="1176">
+            <a:lvl4pPr marL="935980" indent="0">
+              <a:buNone/>
+              <a:defRPr sz="1092">
                 <a:solidFill>
                   <a:schemeClr val="tx1">
                     <a:tint val="75000"/>
@@ -932,9 +932,9 @@
                 </a:solidFill>
               </a:defRPr>
             </a:lvl4pPr>
-            <a:lvl5pPr marL="1344168" indent="0">
-              <a:buNone/>
-              <a:defRPr sz="1176">
+            <a:lvl5pPr marL="1247973" indent="0">
+              <a:buNone/>
+              <a:defRPr sz="1092">
                 <a:solidFill>
                   <a:schemeClr val="tx1">
                     <a:tint val="75000"/>
@@ -942,9 +942,9 @@
                 </a:solidFill>
               </a:defRPr>
             </a:lvl5pPr>
-            <a:lvl6pPr marL="1680210" indent="0">
-              <a:buNone/>
-              <a:defRPr sz="1176">
+            <a:lvl6pPr marL="1559966" indent="0">
+              <a:buNone/>
+              <a:defRPr sz="1092">
                 <a:solidFill>
                   <a:schemeClr val="tx1">
                     <a:tint val="75000"/>
@@ -952,9 +952,9 @@
                 </a:solidFill>
               </a:defRPr>
             </a:lvl6pPr>
-            <a:lvl7pPr marL="2016252" indent="0">
-              <a:buNone/>
-              <a:defRPr sz="1176">
+            <a:lvl7pPr marL="1871960" indent="0">
+              <a:buNone/>
+              <a:defRPr sz="1092">
                 <a:solidFill>
                   <a:schemeClr val="tx1">
                     <a:tint val="75000"/>
@@ -962,9 +962,9 @@
                 </a:solidFill>
               </a:defRPr>
             </a:lvl7pPr>
-            <a:lvl8pPr marL="2352294" indent="0">
-              <a:buNone/>
-              <a:defRPr sz="1176">
+            <a:lvl8pPr marL="2183953" indent="0">
+              <a:buNone/>
+              <a:defRPr sz="1092">
                 <a:solidFill>
                   <a:schemeClr val="tx1">
                     <a:tint val="75000"/>
@@ -972,9 +972,9 @@
                 </a:solidFill>
               </a:defRPr>
             </a:lvl8pPr>
-            <a:lvl9pPr marL="2688336" indent="0">
-              <a:buNone/>
-              <a:defRPr sz="1176">
+            <a:lvl9pPr marL="2495946" indent="0">
+              <a:buNone/>
+              <a:defRPr sz="1092">
                 <a:solidFill>
                   <a:schemeClr val="tx1">
                     <a:tint val="75000"/>
@@ -1009,7 +1009,7 @@
           <a:p>
             <a:fld id="{F36677F3-1F9B-46FD-BBE5-D06ED2754F5B}" type="datetimeFigureOut">
               <a:rPr lang="es-ES" smtClean="0"/>
-              <a:t>08/07/2026</a:t>
+              <a:t>10/07/2026</a:t>
             </a:fld>
             <a:endParaRPr lang="es-ES"/>
           </a:p>
@@ -1060,7 +1060,7 @@
     </p:spTree>
     <p:extLst>
       <p:ext uri="{BB962C8B-B14F-4D97-AF65-F5344CB8AC3E}">
-        <p14:creationId xmlns:p14="http://schemas.microsoft.com/office/powerpoint/2010/main" val="419215228"/>
+        <p14:creationId xmlns:p14="http://schemas.microsoft.com/office/powerpoint/2010/main" val="1602827621"/>
       </p:ext>
     </p:extLst>
   </p:cSld>
@@ -1122,8 +1122,8 @@
         </p:nvSpPr>
         <p:spPr>
           <a:xfrm>
-            <a:off x="742484" y="1341750"/>
-            <a:ext cx="4589899" cy="3198032"/>
+            <a:off x="742484" y="1245820"/>
+            <a:ext cx="4589899" cy="2969385"/>
           </a:xfrm>
         </p:spPr>
         <p:txBody>
@@ -1179,8 +1179,8 @@
         </p:nvSpPr>
         <p:spPr>
           <a:xfrm>
-            <a:off x="5467380" y="1341750"/>
-            <a:ext cx="4589899" cy="3198032"/>
+            <a:off x="5467380" y="1245820"/>
+            <a:ext cx="4589899" cy="2969385"/>
           </a:xfrm>
         </p:spPr>
         <p:txBody>
@@ -1241,7 +1241,7 @@
           <a:p>
             <a:fld id="{F36677F3-1F9B-46FD-BBE5-D06ED2754F5B}" type="datetimeFigureOut">
               <a:rPr lang="es-ES" smtClean="0"/>
-              <a:t>08/07/2026</a:t>
+              <a:t>10/07/2026</a:t>
             </a:fld>
             <a:endParaRPr lang="es-ES"/>
           </a:p>
@@ -1292,7 +1292,7 @@
     </p:spTree>
     <p:extLst>
       <p:ext uri="{BB962C8B-B14F-4D97-AF65-F5344CB8AC3E}">
-        <p14:creationId xmlns:p14="http://schemas.microsoft.com/office/powerpoint/2010/main" val="4198480677"/>
+        <p14:creationId xmlns:p14="http://schemas.microsoft.com/office/powerpoint/2010/main" val="3536756271"/>
       </p:ext>
     </p:extLst>
   </p:cSld>
@@ -1331,8 +1331,8 @@
         </p:nvSpPr>
         <p:spPr>
           <a:xfrm>
-            <a:off x="743890" y="268350"/>
-            <a:ext cx="9314796" cy="974228"/>
+            <a:off x="743890" y="249164"/>
+            <a:ext cx="9314796" cy="904574"/>
           </a:xfrm>
         </p:spPr>
         <p:txBody>
@@ -1359,8 +1359,8 @@
         </p:nvSpPr>
         <p:spPr>
           <a:xfrm>
-            <a:off x="743891" y="1235577"/>
-            <a:ext cx="4568806" cy="605537"/>
+            <a:off x="743891" y="1147238"/>
+            <a:ext cx="4568806" cy="562244"/>
           </a:xfrm>
         </p:spPr>
         <p:txBody>
@@ -1368,39 +1368,39 @@
           <a:lstStyle>
             <a:lvl1pPr marL="0" indent="0">
               <a:buNone/>
-              <a:defRPr sz="1764" b="1"/>
+              <a:defRPr sz="1638" b="1"/>
             </a:lvl1pPr>
-            <a:lvl2pPr marL="336042" indent="0">
-              <a:buNone/>
-              <a:defRPr sz="1470" b="1"/>
+            <a:lvl2pPr marL="311993" indent="0">
+              <a:buNone/>
+              <a:defRPr sz="1365" b="1"/>
             </a:lvl2pPr>
-            <a:lvl3pPr marL="672084" indent="0">
-              <a:buNone/>
-              <a:defRPr sz="1323" b="1"/>
+            <a:lvl3pPr marL="623987" indent="0">
+              <a:buNone/>
+              <a:defRPr sz="1228" b="1"/>
             </a:lvl3pPr>
-            <a:lvl4pPr marL="1008126" indent="0">
-              <a:buNone/>
-              <a:defRPr sz="1176" b="1"/>
+            <a:lvl4pPr marL="935980" indent="0">
+              <a:buNone/>
+              <a:defRPr sz="1092" b="1"/>
             </a:lvl4pPr>
-            <a:lvl5pPr marL="1344168" indent="0">
-              <a:buNone/>
-              <a:defRPr sz="1176" b="1"/>
+            <a:lvl5pPr marL="1247973" indent="0">
+              <a:buNone/>
+              <a:defRPr sz="1092" b="1"/>
             </a:lvl5pPr>
-            <a:lvl6pPr marL="1680210" indent="0">
-              <a:buNone/>
-              <a:defRPr sz="1176" b="1"/>
+            <a:lvl6pPr marL="1559966" indent="0">
+              <a:buNone/>
+              <a:defRPr sz="1092" b="1"/>
             </a:lvl6pPr>
-            <a:lvl7pPr marL="2016252" indent="0">
-              <a:buNone/>
-              <a:defRPr sz="1176" b="1"/>
+            <a:lvl7pPr marL="1871960" indent="0">
+              <a:buNone/>
+              <a:defRPr sz="1092" b="1"/>
             </a:lvl7pPr>
-            <a:lvl8pPr marL="2352294" indent="0">
-              <a:buNone/>
-              <a:defRPr sz="1176" b="1"/>
+            <a:lvl8pPr marL="2183953" indent="0">
+              <a:buNone/>
+              <a:defRPr sz="1092" b="1"/>
             </a:lvl8pPr>
-            <a:lvl9pPr marL="2688336" indent="0">
-              <a:buNone/>
-              <a:defRPr sz="1176" b="1"/>
+            <a:lvl9pPr marL="2495946" indent="0">
+              <a:buNone/>
+              <a:defRPr sz="1092" b="1"/>
             </a:lvl9pPr>
           </a:lstStyle>
           <a:p>
@@ -1424,8 +1424,8 @@
         </p:nvSpPr>
         <p:spPr>
           <a:xfrm>
-            <a:off x="743891" y="1841114"/>
-            <a:ext cx="4568806" cy="2708002"/>
+            <a:off x="743891" y="1709482"/>
+            <a:ext cx="4568806" cy="2514390"/>
           </a:xfrm>
         </p:spPr>
         <p:txBody>
@@ -1481,8 +1481,8 @@
         </p:nvSpPr>
         <p:spPr>
           <a:xfrm>
-            <a:off x="5467380" y="1235577"/>
-            <a:ext cx="4591306" cy="605537"/>
+            <a:off x="5467380" y="1147238"/>
+            <a:ext cx="4591306" cy="562244"/>
           </a:xfrm>
         </p:spPr>
         <p:txBody>
@@ -1490,39 +1490,39 @@
           <a:lstStyle>
             <a:lvl1pPr marL="0" indent="0">
               <a:buNone/>
-              <a:defRPr sz="1764" b="1"/>
+              <a:defRPr sz="1638" b="1"/>
             </a:lvl1pPr>
-            <a:lvl2pPr marL="336042" indent="0">
-              <a:buNone/>
-              <a:defRPr sz="1470" b="1"/>
+            <a:lvl2pPr marL="311993" indent="0">
+              <a:buNone/>
+              <a:defRPr sz="1365" b="1"/>
             </a:lvl2pPr>
-            <a:lvl3pPr marL="672084" indent="0">
-              <a:buNone/>
-              <a:defRPr sz="1323" b="1"/>
+            <a:lvl3pPr marL="623987" indent="0">
+              <a:buNone/>
+              <a:defRPr sz="1228" b="1"/>
             </a:lvl3pPr>
-            <a:lvl4pPr marL="1008126" indent="0">
-              <a:buNone/>
-              <a:defRPr sz="1176" b="1"/>
+            <a:lvl4pPr marL="935980" indent="0">
+              <a:buNone/>
+              <a:defRPr sz="1092" b="1"/>
             </a:lvl4pPr>
-            <a:lvl5pPr marL="1344168" indent="0">
-              <a:buNone/>
-              <a:defRPr sz="1176" b="1"/>
+            <a:lvl5pPr marL="1247973" indent="0">
+              <a:buNone/>
+              <a:defRPr sz="1092" b="1"/>
             </a:lvl5pPr>
-            <a:lvl6pPr marL="1680210" indent="0">
-              <a:buNone/>
-              <a:defRPr sz="1176" b="1"/>
+            <a:lvl6pPr marL="1559966" indent="0">
+              <a:buNone/>
+              <a:defRPr sz="1092" b="1"/>
             </a:lvl6pPr>
-            <a:lvl7pPr marL="2016252" indent="0">
-              <a:buNone/>
-              <a:defRPr sz="1176" b="1"/>
+            <a:lvl7pPr marL="1871960" indent="0">
+              <a:buNone/>
+              <a:defRPr sz="1092" b="1"/>
             </a:lvl7pPr>
-            <a:lvl8pPr marL="2352294" indent="0">
-              <a:buNone/>
-              <a:defRPr sz="1176" b="1"/>
+            <a:lvl8pPr marL="2183953" indent="0">
+              <a:buNone/>
+              <a:defRPr sz="1092" b="1"/>
             </a:lvl8pPr>
-            <a:lvl9pPr marL="2688336" indent="0">
-              <a:buNone/>
-              <a:defRPr sz="1176" b="1"/>
+            <a:lvl9pPr marL="2495946" indent="0">
+              <a:buNone/>
+              <a:defRPr sz="1092" b="1"/>
             </a:lvl9pPr>
           </a:lstStyle>
           <a:p>
@@ -1546,8 +1546,8 @@
         </p:nvSpPr>
         <p:spPr>
           <a:xfrm>
-            <a:off x="5467380" y="1841114"/>
-            <a:ext cx="4591306" cy="2708002"/>
+            <a:off x="5467380" y="1709482"/>
+            <a:ext cx="4591306" cy="2514390"/>
           </a:xfrm>
         </p:spPr>
         <p:txBody>
@@ -1608,7 +1608,7 @@
           <a:p>
             <a:fld id="{F36677F3-1F9B-46FD-BBE5-D06ED2754F5B}" type="datetimeFigureOut">
               <a:rPr lang="es-ES" smtClean="0"/>
-              <a:t>08/07/2026</a:t>
+              <a:t>10/07/2026</a:t>
             </a:fld>
             <a:endParaRPr lang="es-ES"/>
           </a:p>
@@ -1659,7 +1659,7 @@
     </p:spTree>
     <p:extLst>
       <p:ext uri="{BB962C8B-B14F-4D97-AF65-F5344CB8AC3E}">
-        <p14:creationId xmlns:p14="http://schemas.microsoft.com/office/powerpoint/2010/main" val="2768654689"/>
+        <p14:creationId xmlns:p14="http://schemas.microsoft.com/office/powerpoint/2010/main" val="3200486273"/>
       </p:ext>
     </p:extLst>
   </p:cSld>
@@ -1726,7 +1726,7 @@
           <a:p>
             <a:fld id="{F36677F3-1F9B-46FD-BBE5-D06ED2754F5B}" type="datetimeFigureOut">
               <a:rPr lang="es-ES" smtClean="0"/>
-              <a:t>08/07/2026</a:t>
+              <a:t>10/07/2026</a:t>
             </a:fld>
             <a:endParaRPr lang="es-ES"/>
           </a:p>
@@ -1777,7 +1777,7 @@
     </p:spTree>
     <p:extLst>
       <p:ext uri="{BB962C8B-B14F-4D97-AF65-F5344CB8AC3E}">
-        <p14:creationId xmlns:p14="http://schemas.microsoft.com/office/powerpoint/2010/main" val="1219564120"/>
+        <p14:creationId xmlns:p14="http://schemas.microsoft.com/office/powerpoint/2010/main" val="1049263420"/>
       </p:ext>
     </p:extLst>
   </p:cSld>
@@ -1821,7 +1821,7 @@
           <a:p>
             <a:fld id="{F36677F3-1F9B-46FD-BBE5-D06ED2754F5B}" type="datetimeFigureOut">
               <a:rPr lang="es-ES" smtClean="0"/>
-              <a:t>08/07/2026</a:t>
+              <a:t>10/07/2026</a:t>
             </a:fld>
             <a:endParaRPr lang="es-ES"/>
           </a:p>
@@ -1872,7 +1872,7 @@
     </p:spTree>
     <p:extLst>
       <p:ext uri="{BB962C8B-B14F-4D97-AF65-F5344CB8AC3E}">
-        <p14:creationId xmlns:p14="http://schemas.microsoft.com/office/powerpoint/2010/main" val="1778688918"/>
+        <p14:creationId xmlns:p14="http://schemas.microsoft.com/office/powerpoint/2010/main" val="1788060996"/>
       </p:ext>
     </p:extLst>
   </p:cSld>
@@ -1911,15 +1911,15 @@
         </p:nvSpPr>
         <p:spPr>
           <a:xfrm>
-            <a:off x="743891" y="336021"/>
-            <a:ext cx="3483204" cy="1176073"/>
+            <a:off x="743891" y="311997"/>
+            <a:ext cx="3483204" cy="1091988"/>
           </a:xfrm>
         </p:spPr>
         <p:txBody>
           <a:bodyPr anchor="b"/>
           <a:lstStyle>
             <a:lvl1pPr>
-              <a:defRPr sz="2352"/>
+              <a:defRPr sz="2184"/>
             </a:lvl1pPr>
           </a:lstStyle>
           <a:p>
@@ -1943,39 +1943,39 @@
         </p:nvSpPr>
         <p:spPr>
           <a:xfrm>
-            <a:off x="4591306" y="725712"/>
-            <a:ext cx="5467380" cy="3581889"/>
+            <a:off x="4591306" y="673826"/>
+            <a:ext cx="5467380" cy="3325798"/>
           </a:xfrm>
         </p:spPr>
         <p:txBody>
           <a:bodyPr/>
           <a:lstStyle>
             <a:lvl1pPr>
-              <a:defRPr sz="2352"/>
+              <a:defRPr sz="2184"/>
             </a:lvl1pPr>
             <a:lvl2pPr>
-              <a:defRPr sz="2058"/>
+              <a:defRPr sz="1911"/>
             </a:lvl2pPr>
             <a:lvl3pPr>
-              <a:defRPr sz="1764"/>
+              <a:defRPr sz="1638"/>
             </a:lvl3pPr>
             <a:lvl4pPr>
-              <a:defRPr sz="1470"/>
+              <a:defRPr sz="1365"/>
             </a:lvl4pPr>
             <a:lvl5pPr>
-              <a:defRPr sz="1470"/>
+              <a:defRPr sz="1365"/>
             </a:lvl5pPr>
             <a:lvl6pPr>
-              <a:defRPr sz="1470"/>
+              <a:defRPr sz="1365"/>
             </a:lvl6pPr>
             <a:lvl7pPr>
-              <a:defRPr sz="1470"/>
+              <a:defRPr sz="1365"/>
             </a:lvl7pPr>
             <a:lvl8pPr>
-              <a:defRPr sz="1470"/>
+              <a:defRPr sz="1365"/>
             </a:lvl8pPr>
             <a:lvl9pPr>
-              <a:defRPr sz="1470"/>
+              <a:defRPr sz="1365"/>
             </a:lvl9pPr>
           </a:lstStyle>
           <a:p>
@@ -2028,8 +2028,8 @@
         </p:nvSpPr>
         <p:spPr>
           <a:xfrm>
-            <a:off x="743891" y="1512094"/>
-            <a:ext cx="3483204" cy="2801341"/>
+            <a:off x="743891" y="1403985"/>
+            <a:ext cx="3483204" cy="2601056"/>
           </a:xfrm>
         </p:spPr>
         <p:txBody>
@@ -2037,39 +2037,39 @@
           <a:lstStyle>
             <a:lvl1pPr marL="0" indent="0">
               <a:buNone/>
-              <a:defRPr sz="1176"/>
+              <a:defRPr sz="1092"/>
             </a:lvl1pPr>
-            <a:lvl2pPr marL="336042" indent="0">
-              <a:buNone/>
-              <a:defRPr sz="1029"/>
+            <a:lvl2pPr marL="311993" indent="0">
+              <a:buNone/>
+              <a:defRPr sz="955"/>
             </a:lvl2pPr>
-            <a:lvl3pPr marL="672084" indent="0">
-              <a:buNone/>
-              <a:defRPr sz="882"/>
+            <a:lvl3pPr marL="623987" indent="0">
+              <a:buNone/>
+              <a:defRPr sz="819"/>
             </a:lvl3pPr>
-            <a:lvl4pPr marL="1008126" indent="0">
-              <a:buNone/>
-              <a:defRPr sz="735"/>
+            <a:lvl4pPr marL="935980" indent="0">
+              <a:buNone/>
+              <a:defRPr sz="682"/>
             </a:lvl4pPr>
-            <a:lvl5pPr marL="1344168" indent="0">
-              <a:buNone/>
-              <a:defRPr sz="735"/>
+            <a:lvl5pPr marL="1247973" indent="0">
+              <a:buNone/>
+              <a:defRPr sz="682"/>
             </a:lvl5pPr>
-            <a:lvl6pPr marL="1680210" indent="0">
-              <a:buNone/>
-              <a:defRPr sz="735"/>
+            <a:lvl6pPr marL="1559966" indent="0">
+              <a:buNone/>
+              <a:defRPr sz="682"/>
             </a:lvl6pPr>
-            <a:lvl7pPr marL="2016252" indent="0">
-              <a:buNone/>
-              <a:defRPr sz="735"/>
+            <a:lvl7pPr marL="1871960" indent="0">
+              <a:buNone/>
+              <a:defRPr sz="682"/>
             </a:lvl7pPr>
-            <a:lvl8pPr marL="2352294" indent="0">
-              <a:buNone/>
-              <a:defRPr sz="735"/>
+            <a:lvl8pPr marL="2183953" indent="0">
+              <a:buNone/>
+              <a:defRPr sz="682"/>
             </a:lvl8pPr>
-            <a:lvl9pPr marL="2688336" indent="0">
-              <a:buNone/>
-              <a:defRPr sz="735"/>
+            <a:lvl9pPr marL="2495946" indent="0">
+              <a:buNone/>
+              <a:defRPr sz="682"/>
             </a:lvl9pPr>
           </a:lstStyle>
           <a:p>
@@ -2098,7 +2098,7 @@
           <a:p>
             <a:fld id="{F36677F3-1F9B-46FD-BBE5-D06ED2754F5B}" type="datetimeFigureOut">
               <a:rPr lang="es-ES" smtClean="0"/>
-              <a:t>08/07/2026</a:t>
+              <a:t>10/07/2026</a:t>
             </a:fld>
             <a:endParaRPr lang="es-ES"/>
           </a:p>
@@ -2149,7 +2149,7 @@
     </p:spTree>
     <p:extLst>
       <p:ext uri="{BB962C8B-B14F-4D97-AF65-F5344CB8AC3E}">
-        <p14:creationId xmlns:p14="http://schemas.microsoft.com/office/powerpoint/2010/main" val="4261648517"/>
+        <p14:creationId xmlns:p14="http://schemas.microsoft.com/office/powerpoint/2010/main" val="2638796819"/>
       </p:ext>
     </p:extLst>
   </p:cSld>
@@ -2188,15 +2188,15 @@
         </p:nvSpPr>
         <p:spPr>
           <a:xfrm>
-            <a:off x="743891" y="336021"/>
-            <a:ext cx="3483204" cy="1176073"/>
+            <a:off x="743891" y="311997"/>
+            <a:ext cx="3483204" cy="1091988"/>
           </a:xfrm>
         </p:spPr>
         <p:txBody>
           <a:bodyPr anchor="b"/>
           <a:lstStyle>
             <a:lvl1pPr>
-              <a:defRPr sz="2352"/>
+              <a:defRPr sz="2184"/>
             </a:lvl1pPr>
           </a:lstStyle>
           <a:p>
@@ -2220,8 +2220,8 @@
         </p:nvSpPr>
         <p:spPr>
           <a:xfrm>
-            <a:off x="4591306" y="725712"/>
-            <a:ext cx="5467380" cy="3581889"/>
+            <a:off x="4591306" y="673826"/>
+            <a:ext cx="5467380" cy="3325798"/>
           </a:xfrm>
         </p:spPr>
         <p:txBody>
@@ -2229,39 +2229,39 @@
           <a:lstStyle>
             <a:lvl1pPr marL="0" indent="0">
               <a:buNone/>
-              <a:defRPr sz="2352"/>
+              <a:defRPr sz="2184"/>
             </a:lvl1pPr>
-            <a:lvl2pPr marL="336042" indent="0">
-              <a:buNone/>
-              <a:defRPr sz="2058"/>
+            <a:lvl2pPr marL="311993" indent="0">
+              <a:buNone/>
+              <a:defRPr sz="1911"/>
             </a:lvl2pPr>
-            <a:lvl3pPr marL="672084" indent="0">
-              <a:buNone/>
-              <a:defRPr sz="1764"/>
+            <a:lvl3pPr marL="623987" indent="0">
+              <a:buNone/>
+              <a:defRPr sz="1638"/>
             </a:lvl3pPr>
-            <a:lvl4pPr marL="1008126" indent="0">
-              <a:buNone/>
-              <a:defRPr sz="1470"/>
+            <a:lvl4pPr marL="935980" indent="0">
+              <a:buNone/>
+              <a:defRPr sz="1365"/>
             </a:lvl4pPr>
-            <a:lvl5pPr marL="1344168" indent="0">
-              <a:buNone/>
-              <a:defRPr sz="1470"/>
+            <a:lvl5pPr marL="1247973" indent="0">
+              <a:buNone/>
+              <a:defRPr sz="1365"/>
             </a:lvl5pPr>
-            <a:lvl6pPr marL="1680210" indent="0">
-              <a:buNone/>
-              <a:defRPr sz="1470"/>
+            <a:lvl6pPr marL="1559966" indent="0">
+              <a:buNone/>
+              <a:defRPr sz="1365"/>
             </a:lvl6pPr>
-            <a:lvl7pPr marL="2016252" indent="0">
-              <a:buNone/>
-              <a:defRPr sz="1470"/>
+            <a:lvl7pPr marL="1871960" indent="0">
+              <a:buNone/>
+              <a:defRPr sz="1365"/>
             </a:lvl7pPr>
-            <a:lvl8pPr marL="2352294" indent="0">
-              <a:buNone/>
-              <a:defRPr sz="1470"/>
+            <a:lvl8pPr marL="2183953" indent="0">
+              <a:buNone/>
+              <a:defRPr sz="1365"/>
             </a:lvl8pPr>
-            <a:lvl9pPr marL="2688336" indent="0">
-              <a:buNone/>
-              <a:defRPr sz="1470"/>
+            <a:lvl9pPr marL="2495946" indent="0">
+              <a:buNone/>
+              <a:defRPr sz="1365"/>
             </a:lvl9pPr>
           </a:lstStyle>
           <a:p>
@@ -2285,8 +2285,8 @@
         </p:nvSpPr>
         <p:spPr>
           <a:xfrm>
-            <a:off x="743891" y="1512094"/>
-            <a:ext cx="3483204" cy="2801341"/>
+            <a:off x="743891" y="1403985"/>
+            <a:ext cx="3483204" cy="2601056"/>
           </a:xfrm>
         </p:spPr>
         <p:txBody>
@@ -2294,39 +2294,39 @@
           <a:lstStyle>
             <a:lvl1pPr marL="0" indent="0">
               <a:buNone/>
-              <a:defRPr sz="1176"/>
+              <a:defRPr sz="1092"/>
             </a:lvl1pPr>
-            <a:lvl2pPr marL="336042" indent="0">
-              <a:buNone/>
-              <a:defRPr sz="1029"/>
+            <a:lvl2pPr marL="311993" indent="0">
+              <a:buNone/>
+              <a:defRPr sz="955"/>
             </a:lvl2pPr>
-            <a:lvl3pPr marL="672084" indent="0">
-              <a:buNone/>
-              <a:defRPr sz="882"/>
+            <a:lvl3pPr marL="623987" indent="0">
+              <a:buNone/>
+              <a:defRPr sz="819"/>
             </a:lvl3pPr>
-            <a:lvl4pPr marL="1008126" indent="0">
-              <a:buNone/>
-              <a:defRPr sz="735"/>
+            <a:lvl4pPr marL="935980" indent="0">
+              <a:buNone/>
+              <a:defRPr sz="682"/>
             </a:lvl4pPr>
-            <a:lvl5pPr marL="1344168" indent="0">
-              <a:buNone/>
-              <a:defRPr sz="735"/>
+            <a:lvl5pPr marL="1247973" indent="0">
+              <a:buNone/>
+              <a:defRPr sz="682"/>
             </a:lvl5pPr>
-            <a:lvl6pPr marL="1680210" indent="0">
-              <a:buNone/>
-              <a:defRPr sz="735"/>
+            <a:lvl6pPr marL="1559966" indent="0">
+              <a:buNone/>
+              <a:defRPr sz="682"/>
             </a:lvl6pPr>
-            <a:lvl7pPr marL="2016252" indent="0">
-              <a:buNone/>
-              <a:defRPr sz="735"/>
+            <a:lvl7pPr marL="1871960" indent="0">
+              <a:buNone/>
+              <a:defRPr sz="682"/>
             </a:lvl7pPr>
-            <a:lvl8pPr marL="2352294" indent="0">
-              <a:buNone/>
-              <a:defRPr sz="735"/>
+            <a:lvl8pPr marL="2183953" indent="0">
+              <a:buNone/>
+              <a:defRPr sz="682"/>
             </a:lvl8pPr>
-            <a:lvl9pPr marL="2688336" indent="0">
-              <a:buNone/>
-              <a:defRPr sz="735"/>
+            <a:lvl9pPr marL="2495946" indent="0">
+              <a:buNone/>
+              <a:defRPr sz="682"/>
             </a:lvl9pPr>
           </a:lstStyle>
           <a:p>
@@ -2355,7 +2355,7 @@
           <a:p>
             <a:fld id="{F36677F3-1F9B-46FD-BBE5-D06ED2754F5B}" type="datetimeFigureOut">
               <a:rPr lang="es-ES" smtClean="0"/>
-              <a:t>08/07/2026</a:t>
+              <a:t>10/07/2026</a:t>
             </a:fld>
             <a:endParaRPr lang="es-ES"/>
           </a:p>
@@ -2406,7 +2406,7 @@
     </p:spTree>
     <p:extLst>
       <p:ext uri="{BB962C8B-B14F-4D97-AF65-F5344CB8AC3E}">
-        <p14:creationId xmlns:p14="http://schemas.microsoft.com/office/powerpoint/2010/main" val="2006499255"/>
+        <p14:creationId xmlns:p14="http://schemas.microsoft.com/office/powerpoint/2010/main" val="3985684483"/>
       </p:ext>
     </p:extLst>
   </p:cSld>
@@ -2450,8 +2450,8 @@
         </p:nvSpPr>
         <p:spPr>
           <a:xfrm>
-            <a:off x="742484" y="268350"/>
-            <a:ext cx="9314796" cy="974228"/>
+            <a:off x="742484" y="249164"/>
+            <a:ext cx="9314796" cy="904574"/>
           </a:xfrm>
           <a:prstGeom prst="rect">
             <a:avLst/>
@@ -2483,8 +2483,8 @@
         </p:nvSpPr>
         <p:spPr>
           <a:xfrm>
-            <a:off x="742484" y="1341750"/>
-            <a:ext cx="9314796" cy="3198032"/>
+            <a:off x="742484" y="1245820"/>
+            <a:ext cx="9314796" cy="2969385"/>
           </a:xfrm>
           <a:prstGeom prst="rect">
             <a:avLst/>
@@ -2545,8 +2545,8 @@
         </p:nvSpPr>
         <p:spPr>
           <a:xfrm>
-            <a:off x="742484" y="4671624"/>
-            <a:ext cx="2429947" cy="268350"/>
+            <a:off x="742484" y="4337621"/>
+            <a:ext cx="2429947" cy="249164"/>
           </a:xfrm>
           <a:prstGeom prst="rect">
             <a:avLst/>
@@ -2556,7 +2556,7 @@
           <a:bodyPr vert="horz" lIns="91440" tIns="45720" rIns="91440" bIns="45720" rtlCol="0" anchor="ctr"/>
           <a:lstStyle>
             <a:lvl1pPr algn="l">
-              <a:defRPr sz="882">
+              <a:defRPr sz="819">
                 <a:solidFill>
                   <a:schemeClr val="tx1">
                     <a:tint val="75000"/>
@@ -2568,7 +2568,7 @@
           <a:p>
             <a:fld id="{F36677F3-1F9B-46FD-BBE5-D06ED2754F5B}" type="datetimeFigureOut">
               <a:rPr lang="es-ES" smtClean="0"/>
-              <a:t>08/07/2026</a:t>
+              <a:t>10/07/2026</a:t>
             </a:fld>
             <a:endParaRPr lang="es-ES"/>
           </a:p>
@@ -2586,8 +2586,8 @@
         </p:nvSpPr>
         <p:spPr>
           <a:xfrm>
-            <a:off x="3577422" y="4671624"/>
-            <a:ext cx="3644920" cy="268350"/>
+            <a:off x="3577422" y="4337621"/>
+            <a:ext cx="3644920" cy="249164"/>
           </a:xfrm>
           <a:prstGeom prst="rect">
             <a:avLst/>
@@ -2597,7 +2597,7 @@
           <a:bodyPr vert="horz" lIns="91440" tIns="45720" rIns="91440" bIns="45720" rtlCol="0" anchor="ctr"/>
           <a:lstStyle>
             <a:lvl1pPr algn="ctr">
-              <a:defRPr sz="882">
+              <a:defRPr sz="819">
                 <a:solidFill>
                   <a:schemeClr val="tx1">
                     <a:tint val="75000"/>
@@ -2623,8 +2623,8 @@
         </p:nvSpPr>
         <p:spPr>
           <a:xfrm>
-            <a:off x="7627332" y="4671624"/>
-            <a:ext cx="2429947" cy="268350"/>
+            <a:off x="7627332" y="4337621"/>
+            <a:ext cx="2429947" cy="249164"/>
           </a:xfrm>
           <a:prstGeom prst="rect">
             <a:avLst/>
@@ -2634,7 +2634,7 @@
           <a:bodyPr vert="horz" lIns="91440" tIns="45720" rIns="91440" bIns="45720" rtlCol="0" anchor="ctr"/>
           <a:lstStyle>
             <a:lvl1pPr algn="r">
-              <a:defRPr sz="882">
+              <a:defRPr sz="819">
                 <a:solidFill>
                   <a:schemeClr val="tx1">
                     <a:tint val="75000"/>
@@ -2655,27 +2655,27 @@
     </p:spTree>
     <p:extLst>
       <p:ext uri="{BB962C8B-B14F-4D97-AF65-F5344CB8AC3E}">
-        <p14:creationId xmlns:p14="http://schemas.microsoft.com/office/powerpoint/2010/main" val="3656695048"/>
+        <p14:creationId xmlns:p14="http://schemas.microsoft.com/office/powerpoint/2010/main" val="1388619230"/>
       </p:ext>
     </p:extLst>
   </p:cSld>
   <p:clrMap bg1="lt1" tx1="dk1" bg2="lt2" tx2="dk2" accent1="accent1" accent2="accent2" accent3="accent3" accent4="accent4" accent5="accent5" accent6="accent6" hlink="hlink" folHlink="folHlink"/>
   <p:sldLayoutIdLst>
-    <p:sldLayoutId id="2147483661" r:id="rId1"/>
-    <p:sldLayoutId id="2147483662" r:id="rId2"/>
-    <p:sldLayoutId id="2147483663" r:id="rId3"/>
-    <p:sldLayoutId id="2147483664" r:id="rId4"/>
-    <p:sldLayoutId id="2147483665" r:id="rId5"/>
-    <p:sldLayoutId id="2147483666" r:id="rId6"/>
-    <p:sldLayoutId id="2147483667" r:id="rId7"/>
-    <p:sldLayoutId id="2147483668" r:id="rId8"/>
-    <p:sldLayoutId id="2147483669" r:id="rId9"/>
-    <p:sldLayoutId id="2147483670" r:id="rId10"/>
-    <p:sldLayoutId id="2147483671" r:id="rId11"/>
+    <p:sldLayoutId id="2147483673" r:id="rId1"/>
+    <p:sldLayoutId id="2147483674" r:id="rId2"/>
+    <p:sldLayoutId id="2147483675" r:id="rId3"/>
+    <p:sldLayoutId id="2147483676" r:id="rId4"/>
+    <p:sldLayoutId id="2147483677" r:id="rId5"/>
+    <p:sldLayoutId id="2147483678" r:id="rId6"/>
+    <p:sldLayoutId id="2147483679" r:id="rId7"/>
+    <p:sldLayoutId id="2147483680" r:id="rId8"/>
+    <p:sldLayoutId id="2147483681" r:id="rId9"/>
+    <p:sldLayoutId id="2147483682" r:id="rId10"/>
+    <p:sldLayoutId id="2147483683" r:id="rId11"/>
   </p:sldLayoutIdLst>
   <p:txStyles>
     <p:titleStyle>
-      <a:lvl1pPr algn="l" defTabSz="672084" rtl="0" eaLnBrk="1" latinLnBrk="0" hangingPunct="1">
+      <a:lvl1pPr algn="l" defTabSz="623987" rtl="0" eaLnBrk="1" latinLnBrk="0" hangingPunct="1">
         <a:lnSpc>
           <a:spcPct val="90000"/>
         </a:lnSpc>
@@ -2683,7 +2683,7 @@
           <a:spcPct val="0"/>
         </a:spcBef>
         <a:buNone/>
-        <a:defRPr sz="3234" kern="1200">
+        <a:defRPr sz="3003" kern="1200">
           <a:solidFill>
             <a:schemeClr val="tx1"/>
           </a:solidFill>
@@ -2694,16 +2694,16 @@
       </a:lvl1pPr>
     </p:titleStyle>
     <p:bodyStyle>
-      <a:lvl1pPr marL="168021" indent="-168021" algn="l" defTabSz="672084" rtl="0" eaLnBrk="1" latinLnBrk="0" hangingPunct="1">
+      <a:lvl1pPr marL="155997" indent="-155997" algn="l" defTabSz="623987" rtl="0" eaLnBrk="1" latinLnBrk="0" hangingPunct="1">
         <a:lnSpc>
           <a:spcPct val="90000"/>
         </a:lnSpc>
         <a:spcBef>
-          <a:spcPts val="735"/>
+          <a:spcPts val="682"/>
         </a:spcBef>
         <a:buFont typeface="Arial" panose="020B0604020202020204" pitchFamily="34" charset="0"/>
         <a:buChar char="•"/>
-        <a:defRPr sz="2058" kern="1200">
+        <a:defRPr sz="1911" kern="1200">
           <a:solidFill>
             <a:schemeClr val="tx1"/>
           </a:solidFill>
@@ -2712,16 +2712,16 @@
           <a:cs typeface="+mn-cs"/>
         </a:defRPr>
       </a:lvl1pPr>
-      <a:lvl2pPr marL="504063" indent="-168021" algn="l" defTabSz="672084" rtl="0" eaLnBrk="1" latinLnBrk="0" hangingPunct="1">
+      <a:lvl2pPr marL="467990" indent="-155997" algn="l" defTabSz="623987" rtl="0" eaLnBrk="1" latinLnBrk="0" hangingPunct="1">
         <a:lnSpc>
           <a:spcPct val="90000"/>
         </a:lnSpc>
         <a:spcBef>
-          <a:spcPts val="368"/>
+          <a:spcPts val="341"/>
         </a:spcBef>
         <a:buFont typeface="Arial" panose="020B0604020202020204" pitchFamily="34" charset="0"/>
         <a:buChar char="•"/>
-        <a:defRPr sz="1764" kern="1200">
+        <a:defRPr sz="1638" kern="1200">
           <a:solidFill>
             <a:schemeClr val="tx1"/>
           </a:solidFill>
@@ -2730,16 +2730,16 @@
           <a:cs typeface="+mn-cs"/>
         </a:defRPr>
       </a:lvl2pPr>
-      <a:lvl3pPr marL="840105" indent="-168021" algn="l" defTabSz="672084" rtl="0" eaLnBrk="1" latinLnBrk="0" hangingPunct="1">
+      <a:lvl3pPr marL="779983" indent="-155997" algn="l" defTabSz="623987" rtl="0" eaLnBrk="1" latinLnBrk="0" hangingPunct="1">
         <a:lnSpc>
           <a:spcPct val="90000"/>
         </a:lnSpc>
         <a:spcBef>
-          <a:spcPts val="368"/>
+          <a:spcPts val="341"/>
         </a:spcBef>
         <a:buFont typeface="Arial" panose="020B0604020202020204" pitchFamily="34" charset="0"/>
         <a:buChar char="•"/>
-        <a:defRPr sz="1470" kern="1200">
+        <a:defRPr sz="1365" kern="1200">
           <a:solidFill>
             <a:schemeClr val="tx1"/>
           </a:solidFill>
@@ -2748,16 +2748,16 @@
           <a:cs typeface="+mn-cs"/>
         </a:defRPr>
       </a:lvl3pPr>
-      <a:lvl4pPr marL="1176147" indent="-168021" algn="l" defTabSz="672084" rtl="0" eaLnBrk="1" latinLnBrk="0" hangingPunct="1">
+      <a:lvl4pPr marL="1091976" indent="-155997" algn="l" defTabSz="623987" rtl="0" eaLnBrk="1" latinLnBrk="0" hangingPunct="1">
         <a:lnSpc>
           <a:spcPct val="90000"/>
         </a:lnSpc>
         <a:spcBef>
-          <a:spcPts val="368"/>
+          <a:spcPts val="341"/>
         </a:spcBef>
         <a:buFont typeface="Arial" panose="020B0604020202020204" pitchFamily="34" charset="0"/>
         <a:buChar char="•"/>
-        <a:defRPr sz="1323" kern="1200">
+        <a:defRPr sz="1228" kern="1200">
           <a:solidFill>
             <a:schemeClr val="tx1"/>
           </a:solidFill>
@@ -2766,16 +2766,16 @@
           <a:cs typeface="+mn-cs"/>
         </a:defRPr>
       </a:lvl4pPr>
-      <a:lvl5pPr marL="1512189" indent="-168021" algn="l" defTabSz="672084" rtl="0" eaLnBrk="1" latinLnBrk="0" hangingPunct="1">
+      <a:lvl5pPr marL="1403970" indent="-155997" algn="l" defTabSz="623987" rtl="0" eaLnBrk="1" latinLnBrk="0" hangingPunct="1">
         <a:lnSpc>
           <a:spcPct val="90000"/>
         </a:lnSpc>
         <a:spcBef>
-          <a:spcPts val="368"/>
+          <a:spcPts val="341"/>
         </a:spcBef>
         <a:buFont typeface="Arial" panose="020B0604020202020204" pitchFamily="34" charset="0"/>
         <a:buChar char="•"/>
-        <a:defRPr sz="1323" kern="1200">
+        <a:defRPr sz="1228" kern="1200">
           <a:solidFill>
             <a:schemeClr val="tx1"/>
           </a:solidFill>
@@ -2784,16 +2784,16 @@
           <a:cs typeface="+mn-cs"/>
         </a:defRPr>
       </a:lvl5pPr>
-      <a:lvl6pPr marL="1848231" indent="-168021" algn="l" defTabSz="672084" rtl="0" eaLnBrk="1" latinLnBrk="0" hangingPunct="1">
+      <a:lvl6pPr marL="1715963" indent="-155997" algn="l" defTabSz="623987" rtl="0" eaLnBrk="1" latinLnBrk="0" hangingPunct="1">
         <a:lnSpc>
           <a:spcPct val="90000"/>
         </a:lnSpc>
         <a:spcBef>
-          <a:spcPts val="368"/>
+          <a:spcPts val="341"/>
         </a:spcBef>
         <a:buFont typeface="Arial" panose="020B0604020202020204" pitchFamily="34" charset="0"/>
         <a:buChar char="•"/>
-        <a:defRPr sz="1323" kern="1200">
+        <a:defRPr sz="1228" kern="1200">
           <a:solidFill>
             <a:schemeClr val="tx1"/>
           </a:solidFill>
@@ -2802,16 +2802,16 @@
           <a:cs typeface="+mn-cs"/>
         </a:defRPr>
       </a:lvl6pPr>
-      <a:lvl7pPr marL="2184273" indent="-168021" algn="l" defTabSz="672084" rtl="0" eaLnBrk="1" latinLnBrk="0" hangingPunct="1">
+      <a:lvl7pPr marL="2027956" indent="-155997" algn="l" defTabSz="623987" rtl="0" eaLnBrk="1" latinLnBrk="0" hangingPunct="1">
         <a:lnSpc>
           <a:spcPct val="90000"/>
         </a:lnSpc>
         <a:spcBef>
-          <a:spcPts val="368"/>
+          <a:spcPts val="341"/>
         </a:spcBef>
         <a:buFont typeface="Arial" panose="020B0604020202020204" pitchFamily="34" charset="0"/>
         <a:buChar char="•"/>
-        <a:defRPr sz="1323" kern="1200">
+        <a:defRPr sz="1228" kern="1200">
           <a:solidFill>
             <a:schemeClr val="tx1"/>
           </a:solidFill>
@@ -2820,16 +2820,16 @@
           <a:cs typeface="+mn-cs"/>
         </a:defRPr>
       </a:lvl7pPr>
-      <a:lvl8pPr marL="2520315" indent="-168021" algn="l" defTabSz="672084" rtl="0" eaLnBrk="1" latinLnBrk="0" hangingPunct="1">
+      <a:lvl8pPr marL="2339950" indent="-155997" algn="l" defTabSz="623987" rtl="0" eaLnBrk="1" latinLnBrk="0" hangingPunct="1">
         <a:lnSpc>
           <a:spcPct val="90000"/>
         </a:lnSpc>
         <a:spcBef>
-          <a:spcPts val="368"/>
+          <a:spcPts val="341"/>
         </a:spcBef>
         <a:buFont typeface="Arial" panose="020B0604020202020204" pitchFamily="34" charset="0"/>
         <a:buChar char="•"/>
-        <a:defRPr sz="1323" kern="1200">
+        <a:defRPr sz="1228" kern="1200">
           <a:solidFill>
             <a:schemeClr val="tx1"/>
           </a:solidFill>
@@ -2838,16 +2838,16 @@
           <a:cs typeface="+mn-cs"/>
         </a:defRPr>
       </a:lvl8pPr>
-      <a:lvl9pPr marL="2856357" indent="-168021" algn="l" defTabSz="672084" rtl="0" eaLnBrk="1" latinLnBrk="0" hangingPunct="1">
+      <a:lvl9pPr marL="2651943" indent="-155997" algn="l" defTabSz="623987" rtl="0" eaLnBrk="1" latinLnBrk="0" hangingPunct="1">
         <a:lnSpc>
           <a:spcPct val="90000"/>
         </a:lnSpc>
         <a:spcBef>
-          <a:spcPts val="368"/>
+          <a:spcPts val="341"/>
         </a:spcBef>
         <a:buFont typeface="Arial" panose="020B0604020202020204" pitchFamily="34" charset="0"/>
         <a:buChar char="•"/>
-        <a:defRPr sz="1323" kern="1200">
+        <a:defRPr sz="1228" kern="1200">
           <a:solidFill>
             <a:schemeClr val="tx1"/>
           </a:solidFill>
@@ -2861,8 +2861,8 @@
       <a:defPPr>
         <a:defRPr lang="en-US"/>
       </a:defPPr>
-      <a:lvl1pPr marL="0" algn="l" defTabSz="672084" rtl="0" eaLnBrk="1" latinLnBrk="0" hangingPunct="1">
-        <a:defRPr sz="1323" kern="1200">
+      <a:lvl1pPr marL="0" algn="l" defTabSz="623987" rtl="0" eaLnBrk="1" latinLnBrk="0" hangingPunct="1">
+        <a:defRPr sz="1228" kern="1200">
           <a:solidFill>
             <a:schemeClr val="tx1"/>
           </a:solidFill>
@@ -2871,8 +2871,8 @@
           <a:cs typeface="+mn-cs"/>
         </a:defRPr>
       </a:lvl1pPr>
-      <a:lvl2pPr marL="336042" algn="l" defTabSz="672084" rtl="0" eaLnBrk="1" latinLnBrk="0" hangingPunct="1">
-        <a:defRPr sz="1323" kern="1200">
+      <a:lvl2pPr marL="311993" algn="l" defTabSz="623987" rtl="0" eaLnBrk="1" latinLnBrk="0" hangingPunct="1">
+        <a:defRPr sz="1228" kern="1200">
           <a:solidFill>
             <a:schemeClr val="tx1"/>
           </a:solidFill>
@@ -2881,8 +2881,8 @@
           <a:cs typeface="+mn-cs"/>
         </a:defRPr>
       </a:lvl2pPr>
-      <a:lvl3pPr marL="672084" algn="l" defTabSz="672084" rtl="0" eaLnBrk="1" latinLnBrk="0" hangingPunct="1">
-        <a:defRPr sz="1323" kern="1200">
+      <a:lvl3pPr marL="623987" algn="l" defTabSz="623987" rtl="0" eaLnBrk="1" latinLnBrk="0" hangingPunct="1">
+        <a:defRPr sz="1228" kern="1200">
           <a:solidFill>
             <a:schemeClr val="tx1"/>
           </a:solidFill>
@@ -2891,8 +2891,8 @@
           <a:cs typeface="+mn-cs"/>
         </a:defRPr>
       </a:lvl3pPr>
-      <a:lvl4pPr marL="1008126" algn="l" defTabSz="672084" rtl="0" eaLnBrk="1" latinLnBrk="0" hangingPunct="1">
-        <a:defRPr sz="1323" kern="1200">
+      <a:lvl4pPr marL="935980" algn="l" defTabSz="623987" rtl="0" eaLnBrk="1" latinLnBrk="0" hangingPunct="1">
+        <a:defRPr sz="1228" kern="1200">
           <a:solidFill>
             <a:schemeClr val="tx1"/>
           </a:solidFill>
@@ -2901,8 +2901,8 @@
           <a:cs typeface="+mn-cs"/>
         </a:defRPr>
       </a:lvl4pPr>
-      <a:lvl5pPr marL="1344168" algn="l" defTabSz="672084" rtl="0" eaLnBrk="1" latinLnBrk="0" hangingPunct="1">
-        <a:defRPr sz="1323" kern="1200">
+      <a:lvl5pPr marL="1247973" algn="l" defTabSz="623987" rtl="0" eaLnBrk="1" latinLnBrk="0" hangingPunct="1">
+        <a:defRPr sz="1228" kern="1200">
           <a:solidFill>
             <a:schemeClr val="tx1"/>
           </a:solidFill>
@@ -2911,8 +2911,8 @@
           <a:cs typeface="+mn-cs"/>
         </a:defRPr>
       </a:lvl5pPr>
-      <a:lvl6pPr marL="1680210" algn="l" defTabSz="672084" rtl="0" eaLnBrk="1" latinLnBrk="0" hangingPunct="1">
-        <a:defRPr sz="1323" kern="1200">
+      <a:lvl6pPr marL="1559966" algn="l" defTabSz="623987" rtl="0" eaLnBrk="1" latinLnBrk="0" hangingPunct="1">
+        <a:defRPr sz="1228" kern="1200">
           <a:solidFill>
             <a:schemeClr val="tx1"/>
           </a:solidFill>
@@ -2921,8 +2921,8 @@
           <a:cs typeface="+mn-cs"/>
         </a:defRPr>
       </a:lvl6pPr>
-      <a:lvl7pPr marL="2016252" algn="l" defTabSz="672084" rtl="0" eaLnBrk="1" latinLnBrk="0" hangingPunct="1">
-        <a:defRPr sz="1323" kern="1200">
+      <a:lvl7pPr marL="1871960" algn="l" defTabSz="623987" rtl="0" eaLnBrk="1" latinLnBrk="0" hangingPunct="1">
+        <a:defRPr sz="1228" kern="1200">
           <a:solidFill>
             <a:schemeClr val="tx1"/>
           </a:solidFill>
@@ -2931,8 +2931,8 @@
           <a:cs typeface="+mn-cs"/>
         </a:defRPr>
       </a:lvl7pPr>
-      <a:lvl8pPr marL="2352294" algn="l" defTabSz="672084" rtl="0" eaLnBrk="1" latinLnBrk="0" hangingPunct="1">
-        <a:defRPr sz="1323" kern="1200">
+      <a:lvl8pPr marL="2183953" algn="l" defTabSz="623987" rtl="0" eaLnBrk="1" latinLnBrk="0" hangingPunct="1">
+        <a:defRPr sz="1228" kern="1200">
           <a:solidFill>
             <a:schemeClr val="tx1"/>
           </a:solidFill>
@@ -2941,8 +2941,8 @@
           <a:cs typeface="+mn-cs"/>
         </a:defRPr>
       </a:lvl8pPr>
-      <a:lvl9pPr marL="2688336" algn="l" defTabSz="672084" rtl="0" eaLnBrk="1" latinLnBrk="0" hangingPunct="1">
-        <a:defRPr sz="1323" kern="1200">
+      <a:lvl9pPr marL="2495946" algn="l" defTabSz="623987" rtl="0" eaLnBrk="1" latinLnBrk="0" hangingPunct="1">
+        <a:defRPr sz="1228" kern="1200">
           <a:solidFill>
             <a:schemeClr val="tx1"/>
           </a:solidFill>
@@ -2973,207 +2973,260 @@
           <a:chExt cx="0" cy="0"/>
         </a:xfrm>
       </p:grpSpPr>
-      <p:pic>
-        <p:nvPicPr>
-          <p:cNvPr id="5" name="Imagen 4">
+      <p:grpSp>
+        <p:nvGrpSpPr>
+          <p:cNvPr id="3" name="Grupo 2">
             <a:extLst>
               <a:ext uri="{FF2B5EF4-FFF2-40B4-BE49-F238E27FC236}">
-                <a16:creationId xmlns:a16="http://schemas.microsoft.com/office/drawing/2014/main" id="{6B199BF0-1997-8CF5-A052-A4B48BA093B5}"/>
+                <a16:creationId xmlns:a16="http://schemas.microsoft.com/office/drawing/2014/main" id="{E8972A2E-25BF-33E4-09B4-0FDC773D0B9D}"/>
               </a:ext>
             </a:extLst>
           </p:cNvPr>
-          <p:cNvPicPr>
-            <a:picLocks noChangeAspect="1"/>
-          </p:cNvPicPr>
+          <p:cNvGrpSpPr/>
           <p:nvPr/>
-        </p:nvPicPr>
-        <p:blipFill>
-          <a:blip r:embed="rId2">
-            <a:extLst>
-              <a:ext uri="{28A0092B-C50C-407E-A947-70E740481C1C}">
-                <a14:useLocalDpi xmlns:a14="http://schemas.microsoft.com/office/drawing/2010/main" val="0"/>
-              </a:ext>
-            </a:extLst>
-          </a:blip>
-          <a:srcRect l="16012" t="2236" r="16290" b="25694"/>
-          <a:stretch>
-            <a:fillRect/>
-          </a:stretch>
-        </p:blipFill>
-        <p:spPr>
+        </p:nvGrpSpPr>
+        <p:grpSpPr>
           <a:xfrm>
-            <a:off x="526094" y="264629"/>
-            <a:ext cx="3093929" cy="3104634"/>
+            <a:off x="651165" y="447655"/>
+            <a:ext cx="9825656" cy="3261892"/>
+            <a:chOff x="651165" y="447655"/>
+            <a:chExt cx="9825656" cy="3261892"/>
           </a:xfrm>
-          <a:prstGeom prst="rect">
-            <a:avLst/>
-          </a:prstGeom>
-        </p:spPr>
-      </p:pic>
-      <p:sp>
-        <p:nvSpPr>
-          <p:cNvPr id="6" name="Rectángulo 5">
-            <a:extLst>
-              <a:ext uri="{FF2B5EF4-FFF2-40B4-BE49-F238E27FC236}">
-                <a16:creationId xmlns:a16="http://schemas.microsoft.com/office/drawing/2014/main" id="{8D36DB07-FBAB-3F80-7607-CF3563FACB7F}"/>
-              </a:ext>
-            </a:extLst>
-          </p:cNvPr>
-          <p:cNvSpPr/>
-          <p:nvPr/>
-        </p:nvSpPr>
-        <p:spPr>
-          <a:xfrm>
-            <a:off x="3620023" y="484435"/>
-            <a:ext cx="7179740" cy="2554545"/>
-          </a:xfrm>
-          <a:prstGeom prst="rect">
-            <a:avLst/>
-          </a:prstGeom>
-          <a:noFill/>
-          <a:effectLst/>
-        </p:spPr>
-        <p:txBody>
-          <a:bodyPr wrap="square" lIns="91440" tIns="45720" rIns="91440" bIns="45720">
-            <a:spAutoFit/>
-          </a:bodyPr>
-          <a:lstStyle/>
-          <a:p>
-            <a:pPr algn="ctr"/>
-            <a:r>
-              <a:rPr lang="es-ES" sz="16000" dirty="0">
-                <a:ln w="0">
-                  <a:noFill/>
-                </a:ln>
-                <a:effectLst>
-                  <a:outerShdw blurRad="38100" dist="19050" dir="2700000" algn="tl" rotWithShape="0">
-                    <a:schemeClr val="dk1">
-                      <a:alpha val="40000"/>
+        </p:grpSpPr>
+        <p:pic>
+          <p:nvPicPr>
+            <p:cNvPr id="5" name="Imagen 4">
+              <a:extLst>
+                <a:ext uri="{FF2B5EF4-FFF2-40B4-BE49-F238E27FC236}">
+                  <a16:creationId xmlns:a16="http://schemas.microsoft.com/office/drawing/2014/main" id="{6B199BF0-1997-8CF5-A052-A4B48BA093B5}"/>
+                </a:ext>
+              </a:extLst>
+            </p:cNvPr>
+            <p:cNvPicPr>
+              <a:picLocks noChangeAspect="1"/>
+            </p:cNvPicPr>
+            <p:nvPr/>
+          </p:nvPicPr>
+          <p:blipFill>
+            <a:blip r:embed="rId2">
+              <a:extLst>
+                <a:ext uri="{28A0092B-C50C-407E-A947-70E740481C1C}">
+                  <a14:useLocalDpi xmlns:a14="http://schemas.microsoft.com/office/drawing/2010/main" val="0"/>
+                </a:ext>
+              </a:extLst>
+            </a:blip>
+            <a:srcRect l="16012" t="2236" r="16290" b="25694"/>
+            <a:stretch>
+              <a:fillRect/>
+            </a:stretch>
+          </p:blipFill>
+          <p:spPr>
+            <a:xfrm>
+              <a:off x="651165" y="604913"/>
+              <a:ext cx="3093929" cy="3104634"/>
+            </a:xfrm>
+            <a:prstGeom prst="rect">
+              <a:avLst/>
+            </a:prstGeom>
+          </p:spPr>
+        </p:pic>
+        <p:sp>
+          <p:nvSpPr>
+            <p:cNvPr id="6" name="Rectángulo 5">
+              <a:extLst>
+                <a:ext uri="{FF2B5EF4-FFF2-40B4-BE49-F238E27FC236}">
+                  <a16:creationId xmlns:a16="http://schemas.microsoft.com/office/drawing/2014/main" id="{8D36DB07-FBAB-3F80-7607-CF3563FACB7F}"/>
+                </a:ext>
+              </a:extLst>
+            </p:cNvPr>
+            <p:cNvSpPr/>
+            <p:nvPr/>
+          </p:nvSpPr>
+          <p:spPr>
+            <a:xfrm>
+              <a:off x="3890495" y="447655"/>
+              <a:ext cx="6516000" cy="2554545"/>
+            </a:xfrm>
+            <a:prstGeom prst="rect">
+              <a:avLst/>
+            </a:prstGeom>
+            <a:noFill/>
+            <a:effectLst/>
+          </p:spPr>
+          <p:txBody>
+            <a:bodyPr wrap="square" lIns="91440" tIns="45720" rIns="91440" bIns="45720">
+              <a:spAutoFit/>
+            </a:bodyPr>
+            <a:lstStyle/>
+            <a:p>
+              <a:pPr algn="ctr"/>
+              <a:r>
+                <a:rPr lang="es-ES" sz="16000" b="1" dirty="0">
+                  <a:ln w="0">
+                    <a:noFill/>
+                  </a:ln>
+                  <a:solidFill>
+                    <a:schemeClr val="bg1">
+                      <a:lumMod val="75000"/>
                     </a:schemeClr>
-                  </a:outerShdw>
-                </a:effectLst>
-                <a:latin typeface="Baskerville Old Face" panose="02020602080505020303" pitchFamily="18" charset="0"/>
-                <a:ea typeface="Segoe UI Black" panose="020B0A02040204020203" pitchFamily="34" charset="0"/>
-              </a:rPr>
-              <a:t>PAJOR</a:t>
-            </a:r>
-            <a:endParaRPr lang="es-ES" sz="16000" b="0" cap="none" spc="0" dirty="0">
-              <a:ln w="0">
-                <a:noFill/>
-              </a:ln>
-              <a:effectLst>
-                <a:outerShdw blurRad="38100" dist="19050" dir="2700000" algn="tl" rotWithShape="0">
-                  <a:schemeClr val="dk1">
-                    <a:alpha val="40000"/>
+                  </a:solidFill>
+                  <a:latin typeface="Baskerville Old Face" panose="02020602080505020303" pitchFamily="18" charset="0"/>
+                  <a:ea typeface="Segoe UI Black" panose="020B0A02040204020203" pitchFamily="34" charset="0"/>
+                </a:rPr>
+                <a:t>PAJOR</a:t>
+              </a:r>
+            </a:p>
+          </p:txBody>
+        </p:sp>
+        <p:cxnSp>
+          <p:nvCxnSpPr>
+            <p:cNvPr id="8" name="Conector recto 7">
+              <a:extLst>
+                <a:ext uri="{FF2B5EF4-FFF2-40B4-BE49-F238E27FC236}">
+                  <a16:creationId xmlns:a16="http://schemas.microsoft.com/office/drawing/2014/main" id="{E7A3F428-E04B-286B-0F48-6670A71B8E0E}"/>
+                </a:ext>
+              </a:extLst>
+            </p:cNvPr>
+            <p:cNvCxnSpPr>
+              <a:cxnSpLocks/>
+            </p:cNvCxnSpPr>
+            <p:nvPr/>
+          </p:nvCxnSpPr>
+          <p:spPr>
+            <a:xfrm>
+              <a:off x="3890495" y="2925795"/>
+              <a:ext cx="6516000" cy="0"/>
+            </a:xfrm>
+            <a:prstGeom prst="line">
+              <a:avLst/>
+            </a:prstGeom>
+            <a:ln w="88900">
+              <a:solidFill>
+                <a:srgbClr val="FF0000"/>
+              </a:solidFill>
+            </a:ln>
+          </p:spPr>
+          <p:style>
+            <a:lnRef idx="1">
+              <a:schemeClr val="accent1"/>
+            </a:lnRef>
+            <a:fillRef idx="0">
+              <a:schemeClr val="accent1"/>
+            </a:fillRef>
+            <a:effectRef idx="0">
+              <a:schemeClr val="accent1"/>
+            </a:effectRef>
+            <a:fontRef idx="minor">
+              <a:schemeClr val="tx1"/>
+            </a:fontRef>
+          </p:style>
+        </p:cxnSp>
+        <p:sp>
+          <p:nvSpPr>
+            <p:cNvPr id="9" name="Rectángulo 8">
+              <a:extLst>
+                <a:ext uri="{FF2B5EF4-FFF2-40B4-BE49-F238E27FC236}">
+                  <a16:creationId xmlns:a16="http://schemas.microsoft.com/office/drawing/2014/main" id="{73B714DD-B6A7-1E38-F373-9EEB91862D04}"/>
+                </a:ext>
+              </a:extLst>
+            </p:cNvPr>
+            <p:cNvSpPr/>
+            <p:nvPr/>
+          </p:nvSpPr>
+          <p:spPr>
+            <a:xfrm>
+              <a:off x="3820167" y="3078605"/>
+              <a:ext cx="6656654" cy="630942"/>
+            </a:xfrm>
+            <a:prstGeom prst="rect">
+              <a:avLst/>
+            </a:prstGeom>
+            <a:noFill/>
+          </p:spPr>
+          <p:txBody>
+            <a:bodyPr wrap="square" lIns="91440" tIns="45720" rIns="91440" bIns="45720">
+              <a:spAutoFit/>
+            </a:bodyPr>
+            <a:lstStyle/>
+            <a:p>
+              <a:pPr algn="ctr"/>
+              <a:r>
+                <a:rPr lang="es-ES" sz="3500" dirty="0">
+                  <a:ln w="0"/>
+                  <a:solidFill>
+                    <a:schemeClr val="bg1">
+                      <a:lumMod val="75000"/>
+                    </a:schemeClr>
+                  </a:solidFill>
+                  <a:latin typeface="Segoe UI Black" panose="020B0A02040204020203" pitchFamily="34" charset="0"/>
+                  <a:ea typeface="Segoe UI Black" panose="020B0A02040204020203" pitchFamily="34" charset="0"/>
+                </a:rPr>
+                <a:t>CONSULTORA INMOBILIARIA</a:t>
+              </a:r>
+              <a:endParaRPr lang="es-ES" sz="3500" dirty="0">
+                <a:ln w="0"/>
+                <a:solidFill>
+                  <a:schemeClr val="bg1">
+                    <a:lumMod val="75000"/>
                   </a:schemeClr>
-                </a:outerShdw>
-              </a:effectLst>
-              <a:latin typeface="Baskerville Old Face" panose="02020602080505020303" pitchFamily="18" charset="0"/>
-              <a:ea typeface="Segoe UI Black" panose="020B0A02040204020203" pitchFamily="34" charset="0"/>
-            </a:endParaRPr>
-          </a:p>
-        </p:txBody>
-      </p:sp>
-      <p:cxnSp>
-        <p:nvCxnSpPr>
-          <p:cNvPr id="8" name="Conector recto 7">
-            <a:extLst>
-              <a:ext uri="{FF2B5EF4-FFF2-40B4-BE49-F238E27FC236}">
-                <a16:creationId xmlns:a16="http://schemas.microsoft.com/office/drawing/2014/main" id="{E7A3F428-E04B-286B-0F48-6670A71B8E0E}"/>
-              </a:ext>
-            </a:extLst>
-          </p:cNvPr>
-          <p:cNvCxnSpPr>
-            <a:cxnSpLocks/>
-          </p:cNvCxnSpPr>
-          <p:nvPr/>
-        </p:nvCxnSpPr>
-        <p:spPr>
-          <a:xfrm>
-            <a:off x="3890495" y="3105976"/>
-            <a:ext cx="6516000" cy="0"/>
-          </a:xfrm>
-          <a:prstGeom prst="line">
-            <a:avLst/>
-          </a:prstGeom>
-          <a:ln w="88900">
-            <a:solidFill>
-              <a:srgbClr val="FF0000"/>
-            </a:solidFill>
-          </a:ln>
-        </p:spPr>
-        <p:style>
-          <a:lnRef idx="1">
-            <a:schemeClr val="accent1"/>
-          </a:lnRef>
-          <a:fillRef idx="0">
-            <a:schemeClr val="accent1"/>
-          </a:fillRef>
-          <a:effectRef idx="0">
-            <a:schemeClr val="accent1"/>
-          </a:effectRef>
-          <a:fontRef idx="minor">
-            <a:schemeClr val="tx1"/>
-          </a:fontRef>
-        </p:style>
-      </p:cxnSp>
-      <p:sp>
-        <p:nvSpPr>
-          <p:cNvPr id="9" name="Rectángulo 8">
-            <a:extLst>
-              <a:ext uri="{FF2B5EF4-FFF2-40B4-BE49-F238E27FC236}">
-                <a16:creationId xmlns:a16="http://schemas.microsoft.com/office/drawing/2014/main" id="{73B714DD-B6A7-1E38-F373-9EEB91862D04}"/>
-              </a:ext>
-            </a:extLst>
-          </p:cNvPr>
-          <p:cNvSpPr/>
-          <p:nvPr/>
-        </p:nvSpPr>
-        <p:spPr>
-          <a:xfrm>
-            <a:off x="268508" y="3632548"/>
-            <a:ext cx="10262746" cy="923330"/>
-          </a:xfrm>
-          <a:prstGeom prst="rect">
-            <a:avLst/>
-          </a:prstGeom>
-          <a:noFill/>
-        </p:spPr>
-        <p:txBody>
-          <a:bodyPr wrap="none" lIns="91440" tIns="45720" rIns="91440" bIns="45720">
-            <a:spAutoFit/>
-          </a:bodyPr>
-          <a:lstStyle/>
-          <a:p>
-            <a:pPr algn="ctr"/>
-            <a:r>
-              <a:rPr lang="es-ES" sz="5400" b="0" cap="none" spc="0" dirty="0">
-                <a:ln w="0"/>
-                <a:effectLst>
-                  <a:outerShdw blurRad="38100" dist="19050" dir="2700000" algn="tl" rotWithShape="0">
-                    <a:schemeClr val="dk1">
-                      <a:alpha val="40000"/>
-                    </a:schemeClr>
-                  </a:outerShdw>
-                </a:effectLst>
-                <a:latin typeface="Segoe UI Black" panose="020B0A02040204020203" pitchFamily="34" charset="0"/>
-                <a:ea typeface="Segoe UI Black" panose="020B0A02040204020203" pitchFamily="34" charset="0"/>
-              </a:rPr>
-              <a:t>CONSULTORA INMOBILIARIA</a:t>
-            </a:r>
-            <a:endParaRPr lang="es-ES" sz="5400" b="0" cap="none" spc="0" dirty="0">
-              <a:ln w="0"/>
-              <a:effectLst>
-                <a:outerShdw blurRad="38100" dist="19050" dir="2700000" algn="tl" rotWithShape="0">
-                  <a:schemeClr val="dk1">
-                    <a:alpha val="40000"/>
-                  </a:schemeClr>
-                </a:outerShdw>
-              </a:effectLst>
-            </a:endParaRPr>
-          </a:p>
-        </p:txBody>
-      </p:sp>
+                </a:solidFill>
+              </a:endParaRPr>
+            </a:p>
+          </p:txBody>
+        </p:sp>
+        <p:sp>
+          <p:nvSpPr>
+            <p:cNvPr id="2" name="Elipse 1">
+              <a:extLst>
+                <a:ext uri="{FF2B5EF4-FFF2-40B4-BE49-F238E27FC236}">
+                  <a16:creationId xmlns:a16="http://schemas.microsoft.com/office/drawing/2014/main" id="{5426C6EF-2D27-6F7D-7E8C-F2AA35DA4711}"/>
+                </a:ext>
+              </a:extLst>
+            </p:cNvPr>
+            <p:cNvSpPr/>
+            <p:nvPr/>
+          </p:nvSpPr>
+          <p:spPr>
+            <a:xfrm>
+              <a:off x="722129" y="681230"/>
+              <a:ext cx="2952000" cy="2952000"/>
+            </a:xfrm>
+            <a:prstGeom prst="ellipse">
+              <a:avLst/>
+            </a:prstGeom>
+            <a:noFill/>
+            <a:ln w="88900">
+              <a:solidFill>
+                <a:srgbClr val="FF0000"/>
+              </a:solidFill>
+            </a:ln>
+          </p:spPr>
+          <p:style>
+            <a:lnRef idx="2">
+              <a:schemeClr val="accent1">
+                <a:shade val="15000"/>
+              </a:schemeClr>
+            </a:lnRef>
+            <a:fillRef idx="1">
+              <a:schemeClr val="accent1"/>
+            </a:fillRef>
+            <a:effectRef idx="0">
+              <a:schemeClr val="accent1"/>
+            </a:effectRef>
+            <a:fontRef idx="minor">
+              <a:schemeClr val="lt1"/>
+            </a:fontRef>
+          </p:style>
+          <p:txBody>
+            <a:bodyPr rtlCol="0" anchor="ctr"/>
+            <a:lstStyle/>
+            <a:p>
+              <a:pPr algn="ctr"/>
+              <a:endParaRPr lang="es-ES"/>
+            </a:p>
+          </p:txBody>
+        </p:sp>
+      </p:grpSp>
     </p:spTree>
     <p:extLst>
       <p:ext uri="{BB962C8B-B14F-4D97-AF65-F5344CB8AC3E}">
